--- a/public/fun/pack/pptx/birthdaypro/돌잔치프리미엄_37_돌잡이중심_시나몬로즈.pptx
+++ b/public/fun/pack/pptx/birthdaypro/돌잔치프리미엄_37_돌잡이중심_시나몬로즈.pptx
@@ -112,12 +112,12 @@
   <p:extLst>
     <p:ext uri="{521415D9-36F7-43E2-AB2F-B90AF26B5E84}">
       <p14:sectionLst xmlns:p14="http://schemas.microsoft.com/office/powerpoint/2010/main">
-        <p14:section name="시작" id="{4C3501E7-334F-4C0B-9463-09D6665C71F6}">
+        <p14:section name="시작" id="{3749D460-92A4-4FB1-A99F-F1AD79664A61}">
           <p14:sldIdLst>
             <p14:sldId id="256"/>
           </p14:sldIdLst>
         </p14:section>
-        <p14:section name="본문" id="{9FF1702A-273B-42D2-A67C-55706BA5DB86}">
+        <p14:section name="본문" id="{50C4E741-9AB5-4151-8125-B33748CB6114}">
           <p14:sldIdLst>
             <p14:sldId id="257"/>
             <p14:sldId id="258"/>
@@ -125,7 +125,7 @@
             <p14:sldId id="260"/>
           </p14:sldIdLst>
         </p14:section>
-        <p14:section name="마무리" id="{AE1E534C-57BC-43E3-B48B-3810BAD13A6F}">
+        <p14:section name="마무리" id="{8777EF96-49E1-48A2-B507-5A95FB01A2D7}">
           <p14:sldIdLst>
             <p14:sldId id="261"/>
           </p14:sldIdLst>
@@ -1484,7 +1484,7 @@
             </a:lvl1pPr>
           </a:lstStyle>
           <a:p>
-            <a:fld id="{5C99F84C-F1F7-4133-92CE-1BC5E5A14A21}" type="slidenum">
+            <a:fld id="{5294FFB6-3817-4714-8168-D41CE2EAA868}" type="slidenum">
               <a:rPr lang="en-US"/>
               <a:t>‹#›</a:t>
             </a:fld>
@@ -2108,7 +2108,7 @@
             </a:lvl1pPr>
           </a:lstStyle>
           <a:p>
-            <a:fld id="{6EE67A0A-0C82-409C-91D7-0F89F12E51CC}" type="slidenum">
+            <a:fld id="{160116B4-D5E0-479F-A4AD-58082302FD35}" type="slidenum">
               <a:rPr lang="en-US"/>
               <a:t>‹#›</a:t>
             </a:fld>
@@ -2697,7 +2697,7 @@
             </a:lvl1pPr>
           </a:lstStyle>
           <a:p>
-            <a:fld id="{06E6AAE6-CD1C-4B27-B996-C3AB20ED62ED}" type="slidenum">
+            <a:fld id="{8A269B27-10F8-49B8-B802-A1708F96788A}" type="slidenum">
               <a:rPr lang="en-US"/>
               <a:t>‹#›</a:t>
             </a:fld>
@@ -3500,7 +3500,7 @@
           <a:p>
             <a:r>
               <a:rPr lang="ko-KR"/>
-              <a:t>아기 이름 · 0000. 00. 00</a:t>
+              <a:t>아기 이름 · 날짜 입력</a:t>
             </a:r>
           </a:p>
           <a:p>
@@ -3663,7 +3663,7 @@
           <a:bodyPr/>
           <a:lstStyle/>
           <a:p>
-            <a:fld id="{744AD3C1-894A-4CEC-9C71-62BA50A33248}" type="slidenum">
+            <a:fld id="{3F0C10F0-F09D-455C-9371-59D70546760E}" type="slidenum">
               <a:rPr lang="en-US"/>
               <a:t>‹#›</a:t>
             </a:fld>
@@ -4263,7 +4263,7 @@
           <a:bodyPr/>
           <a:lstStyle/>
           <a:p>
-            <a:fld id="{C85B9560-2A20-45A4-B5A2-B43EF27B71B2}" type="slidenum">
+            <a:fld id="{A6DE40EB-BD7C-4F98-8B80-5E3A1AC4D96F}" type="slidenum">
               <a:rPr lang="en-US"/>
               <a:t>‹#›</a:t>
             </a:fld>
@@ -5527,7 +5527,7 @@
           <a:bodyPr/>
           <a:lstStyle/>
           <a:p>
-            <a:fld id="{1421D01F-6344-4F22-BC41-6B8C71229E30}" type="slidenum">
+            <a:fld id="{6620C98E-E255-4011-B0B5-0F28D1F0DA4D}" type="slidenum">
               <a:rPr lang="en-US"/>
               <a:t>‹#›</a:t>
             </a:fld>
@@ -6306,7 +6306,7 @@
           <a:bodyPr/>
           <a:lstStyle/>
           <a:p>
-            <a:fld id="{E0301546-B764-4CFB-A343-375F7A8FA91B}" type="slidenum">
+            <a:fld id="{7E7785EF-84B4-4C3F-9B80-28A7DEE85E90}" type="slidenum">
               <a:rPr lang="en-US"/>
               <a:t>‹#›</a:t>
             </a:fld>
